--- a/slides/slide-05.pptx
+++ b/slides/slide-05.pptx
@@ -4316,8 +4316,8 @@
         </p:nvSpPr>
         <p:spPr>
           <a:xfrm xmlns:a="http://schemas.openxmlformats.org/drawingml/2006/main">
-            <a:off x="609480" y="552600"/>
-            <a:ext cx="10953360" cy="647280"/>
+            <a:off x="609600" y="609600"/>
+            <a:ext cx="10972800" cy="685800"/>
           </a:xfrm>
           <a:prstGeom xmlns:a="http://schemas.openxmlformats.org/drawingml/2006/main" prst="rect">
             <a:avLst/>
@@ -4338,8 +4338,8 @@
             <a:noAutofit/>
           </a:bodyPr>
           <a:lstStyle xmlns:a="http://schemas.openxmlformats.org/drawingml/2006/main">
-            <a:defPPr>
-              <a:defRPr>
+            <a:defPPr algn="l">
+              <a:defRPr sz="3300">
                 <a:solidFill>
                   <a:srgbClr val="F7F7F2"/>
                 </a:solidFill>
@@ -4348,9 +4348,9 @@
                 <a:cs typeface="HarmonyOS Sans SC"/>
               </a:defRPr>
             </a:defPPr>
-            <a:lvl1pPr>
-              <a:buNone/>
-              <a:defRPr>
+            <a:lvl1pPr algn="l">
+              <a:buNone/>
+              <a:defRPr sz="3300">
                 <a:solidFill>
                   <a:srgbClr val="F7F7F2"/>
                 </a:solidFill>
@@ -4359,9 +4359,9 @@
                 <a:cs typeface="HarmonyOS Sans SC"/>
               </a:defRPr>
             </a:lvl1pPr>
-            <a:lvl2pPr>
-              <a:buNone/>
-              <a:defRPr>
+            <a:lvl2pPr algn="l">
+              <a:buNone/>
+              <a:defRPr sz="3300">
                 <a:solidFill>
                   <a:srgbClr val="F7F7F2"/>
                 </a:solidFill>
@@ -4370,9 +4370,9 @@
                 <a:cs typeface="HarmonyOS Sans SC"/>
               </a:defRPr>
             </a:lvl2pPr>
-            <a:lvl3pPr>
-              <a:buNone/>
-              <a:defRPr>
+            <a:lvl3pPr algn="l">
+              <a:buNone/>
+              <a:defRPr sz="3300">
                 <a:solidFill>
                   <a:srgbClr val="F7F7F2"/>
                 </a:solidFill>
@@ -4381,9 +4381,9 @@
                 <a:cs typeface="HarmonyOS Sans SC"/>
               </a:defRPr>
             </a:lvl3pPr>
-            <a:lvl4pPr>
-              <a:buNone/>
-              <a:defRPr>
+            <a:lvl4pPr algn="l">
+              <a:buNone/>
+              <a:defRPr sz="3300">
                 <a:solidFill>
                   <a:srgbClr val="F7F7F2"/>
                 </a:solidFill>
@@ -4392,9 +4392,9 @@
                 <a:cs typeface="HarmonyOS Sans SC"/>
               </a:defRPr>
             </a:lvl4pPr>
-            <a:lvl5pPr>
-              <a:buNone/>
-              <a:defRPr>
+            <a:lvl5pPr algn="l">
+              <a:buNone/>
+              <a:defRPr sz="3300">
                 <a:solidFill>
                   <a:srgbClr val="F7F7F2"/>
                 </a:solidFill>
@@ -4403,9 +4403,9 @@
                 <a:cs typeface="HarmonyOS Sans SC"/>
               </a:defRPr>
             </a:lvl5pPr>
-            <a:lvl6pPr>
-              <a:buNone/>
-              <a:defRPr>
+            <a:lvl6pPr algn="l">
+              <a:buNone/>
+              <a:defRPr sz="3300">
                 <a:solidFill>
                   <a:srgbClr val="F7F7F2"/>
                 </a:solidFill>
@@ -4414,9 +4414,9 @@
                 <a:cs typeface="HarmonyOS Sans SC"/>
               </a:defRPr>
             </a:lvl6pPr>
-            <a:lvl7pPr>
-              <a:buNone/>
-              <a:defRPr>
+            <a:lvl7pPr algn="l">
+              <a:buNone/>
+              <a:defRPr sz="3300">
                 <a:solidFill>
                   <a:srgbClr val="F7F7F2"/>
                 </a:solidFill>
@@ -4425,9 +4425,9 @@
                 <a:cs typeface="HarmonyOS Sans SC"/>
               </a:defRPr>
             </a:lvl7pPr>
-            <a:lvl8pPr>
-              <a:buNone/>
-              <a:defRPr>
+            <a:lvl8pPr algn="l">
+              <a:buNone/>
+              <a:defRPr sz="3300">
                 <a:solidFill>
                   <a:srgbClr val="F7F7F2"/>
                 </a:solidFill>
@@ -4436,9 +4436,9 @@
                 <a:cs typeface="HarmonyOS Sans SC"/>
               </a:defRPr>
             </a:lvl8pPr>
-            <a:lvl9pPr>
-              <a:buNone/>
-              <a:defRPr>
+            <a:lvl9pPr algn="l">
+              <a:buNone/>
+              <a:defRPr sz="3300">
                 <a:solidFill>
                   <a:srgbClr val="F7F7F2"/>
                 </a:solidFill>
@@ -4449,12 +4449,12 @@
             </a:lvl9pPr>
           </a:lstStyle>
           <a:p xmlns:a="http://schemas.openxmlformats.org/drawingml/2006/main">
-            <a:pPr>
+            <a:pPr algn="l">
               <a:lnSpc>
                 <a:spcPct val="116000"/>
               </a:lnSpc>
               <a:buNone/>
-              <a:defRPr>
+              <a:defRPr sz="3300">
                 <a:solidFill>
                   <a:srgbClr val="F7F7F2"/>
                 </a:solidFill>
@@ -4464,7 +4464,7 @@
               </a:defRPr>
             </a:pPr>
             <a:r>
-              <a:rPr sz="3450" b="1" u="none" strike="noStrike">
+              <a:rPr sz="3300" b="1" u="none" strike="noStrike">
                 <a:solidFill>
                   <a:srgbClr val="F7F7F2"/>
                 </a:solidFill>
@@ -4501,8 +4501,8 @@
         </p:nvSpPr>
         <p:spPr>
           <a:xfrm xmlns:a="http://schemas.openxmlformats.org/drawingml/2006/main">
-            <a:off x="628560" y="1790640"/>
-            <a:ext cx="5095440" cy="418680"/>
+            <a:off x="609600" y="2133600"/>
+            <a:ext cx="5372100" cy="533400"/>
           </a:xfrm>
           <a:prstGeom xmlns:a="http://schemas.openxmlformats.org/drawingml/2006/main" prst="rect">
             <a:avLst/>
@@ -4523,8 +4523,8 @@
             <a:noAutofit/>
           </a:bodyPr>
           <a:lstStyle xmlns:a="http://schemas.openxmlformats.org/drawingml/2006/main">
-            <a:defPPr>
-              <a:defRPr>
+            <a:defPPr algn="l">
+              <a:defRPr sz="2100">
                 <a:solidFill>
                   <a:srgbClr val="A6A7B2"/>
                 </a:solidFill>
@@ -4533,9 +4533,9 @@
                 <a:cs typeface="HarmonyOS Sans SC"/>
               </a:defRPr>
             </a:defPPr>
-            <a:lvl1pPr>
-              <a:buNone/>
-              <a:defRPr>
+            <a:lvl1pPr algn="l">
+              <a:buNone/>
+              <a:defRPr sz="2100">
                 <a:solidFill>
                   <a:srgbClr val="A6A7B2"/>
                 </a:solidFill>
@@ -4544,9 +4544,9 @@
                 <a:cs typeface="HarmonyOS Sans SC"/>
               </a:defRPr>
             </a:lvl1pPr>
-            <a:lvl2pPr>
-              <a:buNone/>
-              <a:defRPr>
+            <a:lvl2pPr algn="l">
+              <a:buNone/>
+              <a:defRPr sz="2100">
                 <a:solidFill>
                   <a:srgbClr val="A6A7B2"/>
                 </a:solidFill>
@@ -4555,9 +4555,9 @@
                 <a:cs typeface="HarmonyOS Sans SC"/>
               </a:defRPr>
             </a:lvl2pPr>
-            <a:lvl3pPr>
-              <a:buNone/>
-              <a:defRPr>
+            <a:lvl3pPr algn="l">
+              <a:buNone/>
+              <a:defRPr sz="2100">
                 <a:solidFill>
                   <a:srgbClr val="A6A7B2"/>
                 </a:solidFill>
@@ -4566,9 +4566,9 @@
                 <a:cs typeface="HarmonyOS Sans SC"/>
               </a:defRPr>
             </a:lvl3pPr>
-            <a:lvl4pPr>
-              <a:buNone/>
-              <a:defRPr>
+            <a:lvl4pPr algn="l">
+              <a:buNone/>
+              <a:defRPr sz="2100">
                 <a:solidFill>
                   <a:srgbClr val="A6A7B2"/>
                 </a:solidFill>
@@ -4577,9 +4577,9 @@
                 <a:cs typeface="HarmonyOS Sans SC"/>
               </a:defRPr>
             </a:lvl4pPr>
-            <a:lvl5pPr>
-              <a:buNone/>
-              <a:defRPr>
+            <a:lvl5pPr algn="l">
+              <a:buNone/>
+              <a:defRPr sz="2100">
                 <a:solidFill>
                   <a:srgbClr val="A6A7B2"/>
                 </a:solidFill>
@@ -4588,9 +4588,9 @@
                 <a:cs typeface="HarmonyOS Sans SC"/>
               </a:defRPr>
             </a:lvl5pPr>
-            <a:lvl6pPr>
-              <a:buNone/>
-              <a:defRPr>
+            <a:lvl6pPr algn="l">
+              <a:buNone/>
+              <a:defRPr sz="2100">
                 <a:solidFill>
                   <a:srgbClr val="A6A7B2"/>
                 </a:solidFill>
@@ -4599,9 +4599,9 @@
                 <a:cs typeface="HarmonyOS Sans SC"/>
               </a:defRPr>
             </a:lvl6pPr>
-            <a:lvl7pPr>
-              <a:buNone/>
-              <a:defRPr>
+            <a:lvl7pPr algn="l">
+              <a:buNone/>
+              <a:defRPr sz="2100">
                 <a:solidFill>
                   <a:srgbClr val="A6A7B2"/>
                 </a:solidFill>
@@ -4610,9 +4610,9 @@
                 <a:cs typeface="HarmonyOS Sans SC"/>
               </a:defRPr>
             </a:lvl7pPr>
-            <a:lvl8pPr>
-              <a:buNone/>
-              <a:defRPr>
+            <a:lvl8pPr algn="l">
+              <a:buNone/>
+              <a:defRPr sz="2100">
                 <a:solidFill>
                   <a:srgbClr val="A6A7B2"/>
                 </a:solidFill>
@@ -4621,9 +4621,9 @@
                 <a:cs typeface="HarmonyOS Sans SC"/>
               </a:defRPr>
             </a:lvl8pPr>
-            <a:lvl9pPr>
-              <a:buNone/>
-              <a:defRPr>
+            <a:lvl9pPr algn="l">
+              <a:buNone/>
+              <a:defRPr sz="2100">
                 <a:solidFill>
                   <a:srgbClr val="A6A7B2"/>
                 </a:solidFill>
@@ -4634,12 +4634,12 @@
             </a:lvl9pPr>
           </a:lstStyle>
           <a:p xmlns:a="http://schemas.openxmlformats.org/drawingml/2006/main">
-            <a:pPr>
+            <a:pPr algn="l">
               <a:lnSpc>
                 <a:spcPct val="116000"/>
               </a:lnSpc>
               <a:buNone/>
-              <a:defRPr>
+              <a:defRPr sz="2100">
                 <a:solidFill>
                   <a:srgbClr val="A6A7B2"/>
                 </a:solidFill>
@@ -4649,7 +4649,7 @@
               </a:defRPr>
             </a:pPr>
             <a:r>
-              <a:rPr sz="2170" b="1" u="none" strike="noStrike">
+              <a:rPr sz="2100" b="1" u="none" strike="noStrike">
                 <a:solidFill>
                   <a:srgbClr val="A6A7B2"/>
                 </a:solidFill>
@@ -4686,8 +4686,8 @@
         </p:nvSpPr>
         <p:spPr>
           <a:xfrm xmlns:a="http://schemas.openxmlformats.org/drawingml/2006/main">
-            <a:off x="6391440" y="1790640"/>
-            <a:ext cx="5047920" cy="418680"/>
+            <a:off x="6210300" y="2133600"/>
+            <a:ext cx="5372100" cy="533400"/>
           </a:xfrm>
           <a:prstGeom xmlns:a="http://schemas.openxmlformats.org/drawingml/2006/main" prst="rect">
             <a:avLst/>
@@ -4708,19 +4708,19 @@
             <a:noAutofit/>
           </a:bodyPr>
           <a:lstStyle xmlns:a="http://schemas.openxmlformats.org/drawingml/2006/main">
-            <a:defPPr>
-              <a:defRPr>
-                <a:solidFill>
-                  <a:srgbClr val="F7F7F2"/>
+            <a:defPPr algn="l">
+              <a:defRPr sz="2100">
+                <a:solidFill>
+                  <a:srgbClr val="65E8D4"/>
                 </a:solidFill>
                 <a:latin typeface="HarmonyOS Sans SC"/>
                 <a:ea typeface="HarmonyOS Sans SC"/>
                 <a:cs typeface="HarmonyOS Sans SC"/>
               </a:defRPr>
             </a:defPPr>
-            <a:lvl1pPr>
-              <a:buNone/>
-              <a:defRPr>
+            <a:lvl1pPr algn="l">
+              <a:buNone/>
+              <a:defRPr sz="2100">
                 <a:solidFill>
                   <a:srgbClr val="F7F7F2"/>
                 </a:solidFill>
@@ -4729,9 +4729,9 @@
                 <a:cs typeface="HarmonyOS Sans SC"/>
               </a:defRPr>
             </a:lvl1pPr>
-            <a:lvl2pPr>
-              <a:buNone/>
-              <a:defRPr>
+            <a:lvl2pPr algn="l">
+              <a:buNone/>
+              <a:defRPr sz="2100">
                 <a:solidFill>
                   <a:srgbClr val="F7F7F2"/>
                 </a:solidFill>
@@ -4740,9 +4740,9 @@
                 <a:cs typeface="HarmonyOS Sans SC"/>
               </a:defRPr>
             </a:lvl2pPr>
-            <a:lvl3pPr>
-              <a:buNone/>
-              <a:defRPr>
+            <a:lvl3pPr algn="l">
+              <a:buNone/>
+              <a:defRPr sz="2100">
                 <a:solidFill>
                   <a:srgbClr val="F7F7F2"/>
                 </a:solidFill>
@@ -4751,9 +4751,9 @@
                 <a:cs typeface="HarmonyOS Sans SC"/>
               </a:defRPr>
             </a:lvl3pPr>
-            <a:lvl4pPr>
-              <a:buNone/>
-              <a:defRPr>
+            <a:lvl4pPr algn="l">
+              <a:buNone/>
+              <a:defRPr sz="2100">
                 <a:solidFill>
                   <a:srgbClr val="F7F7F2"/>
                 </a:solidFill>
@@ -4762,9 +4762,9 @@
                 <a:cs typeface="HarmonyOS Sans SC"/>
               </a:defRPr>
             </a:lvl4pPr>
-            <a:lvl5pPr>
-              <a:buNone/>
-              <a:defRPr>
+            <a:lvl5pPr algn="l">
+              <a:buNone/>
+              <a:defRPr sz="2100">
                 <a:solidFill>
                   <a:srgbClr val="F7F7F2"/>
                 </a:solidFill>
@@ -4773,9 +4773,9 @@
                 <a:cs typeface="HarmonyOS Sans SC"/>
               </a:defRPr>
             </a:lvl5pPr>
-            <a:lvl6pPr>
-              <a:buNone/>
-              <a:defRPr>
+            <a:lvl6pPr algn="l">
+              <a:buNone/>
+              <a:defRPr sz="2100">
                 <a:solidFill>
                   <a:srgbClr val="F7F7F2"/>
                 </a:solidFill>
@@ -4784,9 +4784,9 @@
                 <a:cs typeface="HarmonyOS Sans SC"/>
               </a:defRPr>
             </a:lvl6pPr>
-            <a:lvl7pPr>
-              <a:buNone/>
-              <a:defRPr>
+            <a:lvl7pPr algn="l">
+              <a:buNone/>
+              <a:defRPr sz="2100">
                 <a:solidFill>
                   <a:srgbClr val="F7F7F2"/>
                 </a:solidFill>
@@ -4795,9 +4795,9 @@
                 <a:cs typeface="HarmonyOS Sans SC"/>
               </a:defRPr>
             </a:lvl7pPr>
-            <a:lvl8pPr>
-              <a:buNone/>
-              <a:defRPr>
+            <a:lvl8pPr algn="l">
+              <a:buNone/>
+              <a:defRPr sz="2100">
                 <a:solidFill>
                   <a:srgbClr val="F7F7F2"/>
                 </a:solidFill>
@@ -4806,9 +4806,9 @@
                 <a:cs typeface="HarmonyOS Sans SC"/>
               </a:defRPr>
             </a:lvl8pPr>
-            <a:lvl9pPr>
-              <a:buNone/>
-              <a:defRPr>
+            <a:lvl9pPr algn="l">
+              <a:buNone/>
+              <a:defRPr sz="2100">
                 <a:solidFill>
                   <a:srgbClr val="F7F7F2"/>
                 </a:solidFill>
@@ -4819,14 +4819,14 @@
             </a:lvl9pPr>
           </a:lstStyle>
           <a:p xmlns:a="http://schemas.openxmlformats.org/drawingml/2006/main">
-            <a:pPr>
+            <a:pPr algn="l">
               <a:lnSpc>
                 <a:spcPct val="116000"/>
               </a:lnSpc>
               <a:buNone/>
-              <a:defRPr>
-                <a:solidFill>
-                  <a:srgbClr val="F7F7F2"/>
+              <a:defRPr sz="2100">
+                <a:solidFill>
+                  <a:srgbClr val="65E8D4"/>
                 </a:solidFill>
                 <a:latin typeface="HarmonyOS Sans SC"/>
                 <a:ea typeface="HarmonyOS Sans SC"/>
@@ -4834,9 +4834,9 @@
               </a:defRPr>
             </a:pPr>
             <a:r>
-              <a:rPr sz="2170" b="1" u="none" strike="noStrike">
-                <a:solidFill>
-                  <a:srgbClr val="F7F7F2"/>
+              <a:rPr sz="2100" b="1" u="none" strike="noStrike">
+                <a:solidFill>
+                  <a:srgbClr val="65E8D4"/>
                 </a:solidFill>
                 <a:latin typeface="HarmonyOS Sans SC"/>
                 <a:ea typeface="HarmonyOS Sans SC"/>
@@ -4845,9 +4845,9 @@
               <a:t>MatrixOS </a:t>
             </a:r>
             <a:r>
-              <a:rPr sz="2170" b="1" u="none" strike="noStrike">
-                <a:solidFill>
-                  <a:srgbClr val="F7F7F2"/>
+              <a:rPr sz="2100" b="1" u="none" strike="noStrike">
+                <a:solidFill>
+                  <a:srgbClr val="65E8D4"/>
                 </a:solidFill>
                 <a:latin typeface="HarmonyOS Sans SC"/>
                 <a:ea typeface="HarmonyOS Sans SC"/>
@@ -4882,8 +4882,8 @@
         </p:nvSpPr>
         <p:spPr>
           <a:xfrm xmlns:a="http://schemas.openxmlformats.org/drawingml/2006/main">
-            <a:off x="628560" y="2695680"/>
-            <a:ext cx="5143320" cy="475920"/>
+            <a:off x="609600" y="3124200"/>
+            <a:ext cx="5372100" cy="609600"/>
           </a:xfrm>
           <a:prstGeom xmlns:a="http://schemas.openxmlformats.org/drawingml/2006/main" prst="rect">
             <a:avLst/>
@@ -4904,8 +4904,8 @@
             <a:noAutofit/>
           </a:bodyPr>
           <a:lstStyle xmlns:a="http://schemas.openxmlformats.org/drawingml/2006/main">
-            <a:defPPr>
-              <a:defRPr>
+            <a:defPPr algn="l">
+              <a:defRPr sz="1950">
                 <a:solidFill>
                   <a:srgbClr val="A6A7B2"/>
                 </a:solidFill>
@@ -4914,9 +4914,9 @@
                 <a:cs typeface="HarmonyOS Sans SC"/>
               </a:defRPr>
             </a:defPPr>
-            <a:lvl1pPr>
-              <a:buNone/>
-              <a:defRPr>
+            <a:lvl1pPr algn="l">
+              <a:buNone/>
+              <a:defRPr sz="1950">
                 <a:solidFill>
                   <a:srgbClr val="A6A7B2"/>
                 </a:solidFill>
@@ -4925,9 +4925,9 @@
                 <a:cs typeface="HarmonyOS Sans SC"/>
               </a:defRPr>
             </a:lvl1pPr>
-            <a:lvl2pPr>
-              <a:buNone/>
-              <a:defRPr>
+            <a:lvl2pPr algn="l">
+              <a:buNone/>
+              <a:defRPr sz="1950">
                 <a:solidFill>
                   <a:srgbClr val="A6A7B2"/>
                 </a:solidFill>
@@ -4936,9 +4936,9 @@
                 <a:cs typeface="HarmonyOS Sans SC"/>
               </a:defRPr>
             </a:lvl2pPr>
-            <a:lvl3pPr>
-              <a:buNone/>
-              <a:defRPr>
+            <a:lvl3pPr algn="l">
+              <a:buNone/>
+              <a:defRPr sz="1950">
                 <a:solidFill>
                   <a:srgbClr val="A6A7B2"/>
                 </a:solidFill>
@@ -4947,9 +4947,9 @@
                 <a:cs typeface="HarmonyOS Sans SC"/>
               </a:defRPr>
             </a:lvl3pPr>
-            <a:lvl4pPr>
-              <a:buNone/>
-              <a:defRPr>
+            <a:lvl4pPr algn="l">
+              <a:buNone/>
+              <a:defRPr sz="1950">
                 <a:solidFill>
                   <a:srgbClr val="A6A7B2"/>
                 </a:solidFill>
@@ -4958,9 +4958,9 @@
                 <a:cs typeface="HarmonyOS Sans SC"/>
               </a:defRPr>
             </a:lvl4pPr>
-            <a:lvl5pPr>
-              <a:buNone/>
-              <a:defRPr>
+            <a:lvl5pPr algn="l">
+              <a:buNone/>
+              <a:defRPr sz="1950">
                 <a:solidFill>
                   <a:srgbClr val="A6A7B2"/>
                 </a:solidFill>
@@ -4969,9 +4969,9 @@
                 <a:cs typeface="HarmonyOS Sans SC"/>
               </a:defRPr>
             </a:lvl5pPr>
-            <a:lvl6pPr>
-              <a:buNone/>
-              <a:defRPr>
+            <a:lvl6pPr algn="l">
+              <a:buNone/>
+              <a:defRPr sz="1950">
                 <a:solidFill>
                   <a:srgbClr val="A6A7B2"/>
                 </a:solidFill>
@@ -4980,9 +4980,9 @@
                 <a:cs typeface="HarmonyOS Sans SC"/>
               </a:defRPr>
             </a:lvl6pPr>
-            <a:lvl7pPr>
-              <a:buNone/>
-              <a:defRPr>
+            <a:lvl7pPr algn="l">
+              <a:buNone/>
+              <a:defRPr sz="1950">
                 <a:solidFill>
                   <a:srgbClr val="A6A7B2"/>
                 </a:solidFill>
@@ -4991,9 +4991,9 @@
                 <a:cs typeface="HarmonyOS Sans SC"/>
               </a:defRPr>
             </a:lvl7pPr>
-            <a:lvl8pPr>
-              <a:buNone/>
-              <a:defRPr>
+            <a:lvl8pPr algn="l">
+              <a:buNone/>
+              <a:defRPr sz="1950">
                 <a:solidFill>
                   <a:srgbClr val="A6A7B2"/>
                 </a:solidFill>
@@ -5002,9 +5002,9 @@
                 <a:cs typeface="HarmonyOS Sans SC"/>
               </a:defRPr>
             </a:lvl8pPr>
-            <a:lvl9pPr>
-              <a:buNone/>
-              <a:defRPr>
+            <a:lvl9pPr algn="l">
+              <a:buNone/>
+              <a:defRPr sz="1950">
                 <a:solidFill>
                   <a:srgbClr val="A6A7B2"/>
                 </a:solidFill>
@@ -5015,12 +5015,12 @@
             </a:lvl9pPr>
           </a:lstStyle>
           <a:p xmlns:a="http://schemas.openxmlformats.org/drawingml/2006/main">
-            <a:pPr>
+            <a:pPr algn="l">
               <a:lnSpc>
                 <a:spcPct val="116000"/>
               </a:lnSpc>
               <a:buNone/>
-              <a:defRPr>
+              <a:defRPr sz="1950">
                 <a:solidFill>
                   <a:srgbClr val="A6A7B2"/>
                 </a:solidFill>
@@ -5030,7 +5030,7 @@
               </a:defRPr>
             </a:pPr>
             <a:r>
-              <a:rPr sz="2020" b="0" u="none" strike="noStrike">
+              <a:rPr sz="1950" b="0" u="none" strike="noStrike">
                 <a:solidFill>
                   <a:srgbClr val="A6A7B2"/>
                 </a:solidFill>
@@ -5067,8 +5067,8 @@
         </p:nvSpPr>
         <p:spPr>
           <a:xfrm xmlns:a="http://schemas.openxmlformats.org/drawingml/2006/main">
-            <a:off x="628560" y="3600360"/>
-            <a:ext cx="5143320" cy="475920"/>
+            <a:off x="609600" y="4038600"/>
+            <a:ext cx="5372100" cy="609600"/>
           </a:xfrm>
           <a:prstGeom xmlns:a="http://schemas.openxmlformats.org/drawingml/2006/main" prst="rect">
             <a:avLst/>
@@ -5089,8 +5089,8 @@
             <a:noAutofit/>
           </a:bodyPr>
           <a:lstStyle xmlns:a="http://schemas.openxmlformats.org/drawingml/2006/main">
-            <a:defPPr>
-              <a:defRPr>
+            <a:defPPr algn="l">
+              <a:defRPr sz="1950">
                 <a:solidFill>
                   <a:srgbClr val="A6A7B2"/>
                 </a:solidFill>
@@ -5099,9 +5099,9 @@
                 <a:cs typeface="HarmonyOS Sans SC"/>
               </a:defRPr>
             </a:defPPr>
-            <a:lvl1pPr>
-              <a:buNone/>
-              <a:defRPr>
+            <a:lvl1pPr algn="l">
+              <a:buNone/>
+              <a:defRPr sz="1950">
                 <a:solidFill>
                   <a:srgbClr val="A6A7B2"/>
                 </a:solidFill>
@@ -5110,9 +5110,9 @@
                 <a:cs typeface="HarmonyOS Sans SC"/>
               </a:defRPr>
             </a:lvl1pPr>
-            <a:lvl2pPr>
-              <a:buNone/>
-              <a:defRPr>
+            <a:lvl2pPr algn="l">
+              <a:buNone/>
+              <a:defRPr sz="1950">
                 <a:solidFill>
                   <a:srgbClr val="A6A7B2"/>
                 </a:solidFill>
@@ -5121,9 +5121,9 @@
                 <a:cs typeface="HarmonyOS Sans SC"/>
               </a:defRPr>
             </a:lvl2pPr>
-            <a:lvl3pPr>
-              <a:buNone/>
-              <a:defRPr>
+            <a:lvl3pPr algn="l">
+              <a:buNone/>
+              <a:defRPr sz="1950">
                 <a:solidFill>
                   <a:srgbClr val="A6A7B2"/>
                 </a:solidFill>
@@ -5132,9 +5132,9 @@
                 <a:cs typeface="HarmonyOS Sans SC"/>
               </a:defRPr>
             </a:lvl3pPr>
-            <a:lvl4pPr>
-              <a:buNone/>
-              <a:defRPr>
+            <a:lvl4pPr algn="l">
+              <a:buNone/>
+              <a:defRPr sz="1950">
                 <a:solidFill>
                   <a:srgbClr val="A6A7B2"/>
                 </a:solidFill>
@@ -5143,9 +5143,9 @@
                 <a:cs typeface="HarmonyOS Sans SC"/>
               </a:defRPr>
             </a:lvl4pPr>
-            <a:lvl5pPr>
-              <a:buNone/>
-              <a:defRPr>
+            <a:lvl5pPr algn="l">
+              <a:buNone/>
+              <a:defRPr sz="1950">
                 <a:solidFill>
                   <a:srgbClr val="A6A7B2"/>
                 </a:solidFill>
@@ -5154,9 +5154,9 @@
                 <a:cs typeface="HarmonyOS Sans SC"/>
               </a:defRPr>
             </a:lvl5pPr>
-            <a:lvl6pPr>
-              <a:buNone/>
-              <a:defRPr>
+            <a:lvl6pPr algn="l">
+              <a:buNone/>
+              <a:defRPr sz="1950">
                 <a:solidFill>
                   <a:srgbClr val="A6A7B2"/>
                 </a:solidFill>
@@ -5165,9 +5165,9 @@
                 <a:cs typeface="HarmonyOS Sans SC"/>
               </a:defRPr>
             </a:lvl6pPr>
-            <a:lvl7pPr>
-              <a:buNone/>
-              <a:defRPr>
+            <a:lvl7pPr algn="l">
+              <a:buNone/>
+              <a:defRPr sz="1950">
                 <a:solidFill>
                   <a:srgbClr val="A6A7B2"/>
                 </a:solidFill>
@@ -5176,9 +5176,9 @@
                 <a:cs typeface="HarmonyOS Sans SC"/>
               </a:defRPr>
             </a:lvl7pPr>
-            <a:lvl8pPr>
-              <a:buNone/>
-              <a:defRPr>
+            <a:lvl8pPr algn="l">
+              <a:buNone/>
+              <a:defRPr sz="1950">
                 <a:solidFill>
                   <a:srgbClr val="A6A7B2"/>
                 </a:solidFill>
@@ -5187,9 +5187,9 @@
                 <a:cs typeface="HarmonyOS Sans SC"/>
               </a:defRPr>
             </a:lvl8pPr>
-            <a:lvl9pPr>
-              <a:buNone/>
-              <a:defRPr>
+            <a:lvl9pPr algn="l">
+              <a:buNone/>
+              <a:defRPr sz="1950">
                 <a:solidFill>
                   <a:srgbClr val="A6A7B2"/>
                 </a:solidFill>
@@ -5200,12 +5200,12 @@
             </a:lvl9pPr>
           </a:lstStyle>
           <a:p xmlns:a="http://schemas.openxmlformats.org/drawingml/2006/main">
-            <a:pPr>
+            <a:pPr algn="l">
               <a:lnSpc>
                 <a:spcPct val="116000"/>
               </a:lnSpc>
               <a:buNone/>
-              <a:defRPr>
+              <a:defRPr sz="1950">
                 <a:solidFill>
                   <a:srgbClr val="A6A7B2"/>
                 </a:solidFill>
@@ -5215,7 +5215,7 @@
               </a:defRPr>
             </a:pPr>
             <a:r>
-              <a:rPr sz="2020" b="0" u="none" strike="noStrike">
+              <a:rPr sz="1950" b="0" u="none" strike="noStrike">
                 <a:solidFill>
                   <a:srgbClr val="A6A7B2"/>
                 </a:solidFill>
@@ -5252,8 +5252,8 @@
         </p:nvSpPr>
         <p:spPr>
           <a:xfrm xmlns:a="http://schemas.openxmlformats.org/drawingml/2006/main">
-            <a:off x="628560" y="4505400"/>
-            <a:ext cx="5143320" cy="475920"/>
+            <a:off x="609600" y="4953000"/>
+            <a:ext cx="5372100" cy="609600"/>
           </a:xfrm>
           <a:prstGeom xmlns:a="http://schemas.openxmlformats.org/drawingml/2006/main" prst="rect">
             <a:avLst/>
@@ -5274,8 +5274,8 @@
             <a:noAutofit/>
           </a:bodyPr>
           <a:lstStyle xmlns:a="http://schemas.openxmlformats.org/drawingml/2006/main">
-            <a:defPPr>
-              <a:defRPr>
+            <a:defPPr algn="l">
+              <a:defRPr sz="1950">
                 <a:solidFill>
                   <a:srgbClr val="A6A7B2"/>
                 </a:solidFill>
@@ -5284,9 +5284,9 @@
                 <a:cs typeface="HarmonyOS Sans SC"/>
               </a:defRPr>
             </a:defPPr>
-            <a:lvl1pPr>
-              <a:buNone/>
-              <a:defRPr>
+            <a:lvl1pPr algn="l">
+              <a:buNone/>
+              <a:defRPr sz="1950">
                 <a:solidFill>
                   <a:srgbClr val="A6A7B2"/>
                 </a:solidFill>
@@ -5295,9 +5295,9 @@
                 <a:cs typeface="HarmonyOS Sans SC"/>
               </a:defRPr>
             </a:lvl1pPr>
-            <a:lvl2pPr>
-              <a:buNone/>
-              <a:defRPr>
+            <a:lvl2pPr algn="l">
+              <a:buNone/>
+              <a:defRPr sz="1950">
                 <a:solidFill>
                   <a:srgbClr val="A6A7B2"/>
                 </a:solidFill>
@@ -5306,9 +5306,9 @@
                 <a:cs typeface="HarmonyOS Sans SC"/>
               </a:defRPr>
             </a:lvl2pPr>
-            <a:lvl3pPr>
-              <a:buNone/>
-              <a:defRPr>
+            <a:lvl3pPr algn="l">
+              <a:buNone/>
+              <a:defRPr sz="1950">
                 <a:solidFill>
                   <a:srgbClr val="A6A7B2"/>
                 </a:solidFill>
@@ -5317,9 +5317,9 @@
                 <a:cs typeface="HarmonyOS Sans SC"/>
               </a:defRPr>
             </a:lvl3pPr>
-            <a:lvl4pPr>
-              <a:buNone/>
-              <a:defRPr>
+            <a:lvl4pPr algn="l">
+              <a:buNone/>
+              <a:defRPr sz="1950">
                 <a:solidFill>
                   <a:srgbClr val="A6A7B2"/>
                 </a:solidFill>
@@ -5328,9 +5328,9 @@
                 <a:cs typeface="HarmonyOS Sans SC"/>
               </a:defRPr>
             </a:lvl4pPr>
-            <a:lvl5pPr>
-              <a:buNone/>
-              <a:defRPr>
+            <a:lvl5pPr algn="l">
+              <a:buNone/>
+              <a:defRPr sz="1950">
                 <a:solidFill>
                   <a:srgbClr val="A6A7B2"/>
                 </a:solidFill>
@@ -5339,9 +5339,9 @@
                 <a:cs typeface="HarmonyOS Sans SC"/>
               </a:defRPr>
             </a:lvl5pPr>
-            <a:lvl6pPr>
-              <a:buNone/>
-              <a:defRPr>
+            <a:lvl6pPr algn="l">
+              <a:buNone/>
+              <a:defRPr sz="1950">
                 <a:solidFill>
                   <a:srgbClr val="A6A7B2"/>
                 </a:solidFill>
@@ -5350,9 +5350,9 @@
                 <a:cs typeface="HarmonyOS Sans SC"/>
               </a:defRPr>
             </a:lvl6pPr>
-            <a:lvl7pPr>
-              <a:buNone/>
-              <a:defRPr>
+            <a:lvl7pPr algn="l">
+              <a:buNone/>
+              <a:defRPr sz="1950">
                 <a:solidFill>
                   <a:srgbClr val="A6A7B2"/>
                 </a:solidFill>
@@ -5361,9 +5361,9 @@
                 <a:cs typeface="HarmonyOS Sans SC"/>
               </a:defRPr>
             </a:lvl7pPr>
-            <a:lvl8pPr>
-              <a:buNone/>
-              <a:defRPr>
+            <a:lvl8pPr algn="l">
+              <a:buNone/>
+              <a:defRPr sz="1950">
                 <a:solidFill>
                   <a:srgbClr val="A6A7B2"/>
                 </a:solidFill>
@@ -5372,9 +5372,9 @@
                 <a:cs typeface="HarmonyOS Sans SC"/>
               </a:defRPr>
             </a:lvl8pPr>
-            <a:lvl9pPr>
-              <a:buNone/>
-              <a:defRPr>
+            <a:lvl9pPr algn="l">
+              <a:buNone/>
+              <a:defRPr sz="1950">
                 <a:solidFill>
                   <a:srgbClr val="A6A7B2"/>
                 </a:solidFill>
@@ -5385,12 +5385,12 @@
             </a:lvl9pPr>
           </a:lstStyle>
           <a:p xmlns:a="http://schemas.openxmlformats.org/drawingml/2006/main">
-            <a:pPr>
+            <a:pPr algn="l">
               <a:lnSpc>
                 <a:spcPct val="116000"/>
               </a:lnSpc>
               <a:buNone/>
-              <a:defRPr>
+              <a:defRPr sz="1950">
                 <a:solidFill>
                   <a:srgbClr val="A6A7B2"/>
                 </a:solidFill>
@@ -5400,7 +5400,7 @@
               </a:defRPr>
             </a:pPr>
             <a:r>
-              <a:rPr sz="2020" b="0" u="none" strike="noStrike">
+              <a:rPr sz="1950" b="0" u="none" strike="noStrike">
                 <a:solidFill>
                   <a:srgbClr val="A6A7B2"/>
                 </a:solidFill>
@@ -5437,8 +5437,8 @@
         </p:nvSpPr>
         <p:spPr>
           <a:xfrm xmlns:a="http://schemas.openxmlformats.org/drawingml/2006/main">
-            <a:off x="6391440" y="2695680"/>
-            <a:ext cx="5190840" cy="475920"/>
+            <a:off x="6210300" y="3124200"/>
+            <a:ext cx="5372100" cy="609600"/>
           </a:xfrm>
           <a:prstGeom xmlns:a="http://schemas.openxmlformats.org/drawingml/2006/main" prst="rect">
             <a:avLst/>
@@ -5459,8 +5459,8 @@
             <a:noAutofit/>
           </a:bodyPr>
           <a:lstStyle xmlns:a="http://schemas.openxmlformats.org/drawingml/2006/main">
-            <a:defPPr>
-              <a:defRPr>
+            <a:defPPr algn="l">
+              <a:defRPr sz="1950">
                 <a:solidFill>
                   <a:srgbClr val="F7F7F2"/>
                 </a:solidFill>
@@ -5469,9 +5469,9 @@
                 <a:cs typeface="HarmonyOS Sans SC"/>
               </a:defRPr>
             </a:defPPr>
-            <a:lvl1pPr>
-              <a:buNone/>
-              <a:defRPr>
+            <a:lvl1pPr algn="l">
+              <a:buNone/>
+              <a:defRPr sz="1950">
                 <a:solidFill>
                   <a:srgbClr val="F7F7F2"/>
                 </a:solidFill>
@@ -5480,9 +5480,9 @@
                 <a:cs typeface="HarmonyOS Sans SC"/>
               </a:defRPr>
             </a:lvl1pPr>
-            <a:lvl2pPr>
-              <a:buNone/>
-              <a:defRPr>
+            <a:lvl2pPr algn="l">
+              <a:buNone/>
+              <a:defRPr sz="1950">
                 <a:solidFill>
                   <a:srgbClr val="F7F7F2"/>
                 </a:solidFill>
@@ -5491,9 +5491,9 @@
                 <a:cs typeface="HarmonyOS Sans SC"/>
               </a:defRPr>
             </a:lvl2pPr>
-            <a:lvl3pPr>
-              <a:buNone/>
-              <a:defRPr>
+            <a:lvl3pPr algn="l">
+              <a:buNone/>
+              <a:defRPr sz="1950">
                 <a:solidFill>
                   <a:srgbClr val="F7F7F2"/>
                 </a:solidFill>
@@ -5502,9 +5502,9 @@
                 <a:cs typeface="HarmonyOS Sans SC"/>
               </a:defRPr>
             </a:lvl3pPr>
-            <a:lvl4pPr>
-              <a:buNone/>
-              <a:defRPr>
+            <a:lvl4pPr algn="l">
+              <a:buNone/>
+              <a:defRPr sz="1950">
                 <a:solidFill>
                   <a:srgbClr val="F7F7F2"/>
                 </a:solidFill>
@@ -5513,9 +5513,9 @@
                 <a:cs typeface="HarmonyOS Sans SC"/>
               </a:defRPr>
             </a:lvl4pPr>
-            <a:lvl5pPr>
-              <a:buNone/>
-              <a:defRPr>
+            <a:lvl5pPr algn="l">
+              <a:buNone/>
+              <a:defRPr sz="1950">
                 <a:solidFill>
                   <a:srgbClr val="F7F7F2"/>
                 </a:solidFill>
@@ -5524,9 +5524,9 @@
                 <a:cs typeface="HarmonyOS Sans SC"/>
               </a:defRPr>
             </a:lvl5pPr>
-            <a:lvl6pPr>
-              <a:buNone/>
-              <a:defRPr>
+            <a:lvl6pPr algn="l">
+              <a:buNone/>
+              <a:defRPr sz="1950">
                 <a:solidFill>
                   <a:srgbClr val="F7F7F2"/>
                 </a:solidFill>
@@ -5535,9 +5535,9 @@
                 <a:cs typeface="HarmonyOS Sans SC"/>
               </a:defRPr>
             </a:lvl6pPr>
-            <a:lvl7pPr>
-              <a:buNone/>
-              <a:defRPr>
+            <a:lvl7pPr algn="l">
+              <a:buNone/>
+              <a:defRPr sz="1950">
                 <a:solidFill>
                   <a:srgbClr val="F7F7F2"/>
                 </a:solidFill>
@@ -5546,9 +5546,9 @@
                 <a:cs typeface="HarmonyOS Sans SC"/>
               </a:defRPr>
             </a:lvl7pPr>
-            <a:lvl8pPr>
-              <a:buNone/>
-              <a:defRPr>
+            <a:lvl8pPr algn="l">
+              <a:buNone/>
+              <a:defRPr sz="1950">
                 <a:solidFill>
                   <a:srgbClr val="F7F7F2"/>
                 </a:solidFill>
@@ -5557,9 +5557,9 @@
                 <a:cs typeface="HarmonyOS Sans SC"/>
               </a:defRPr>
             </a:lvl8pPr>
-            <a:lvl9pPr>
-              <a:buNone/>
-              <a:defRPr>
+            <a:lvl9pPr algn="l">
+              <a:buNone/>
+              <a:defRPr sz="1950">
                 <a:solidFill>
                   <a:srgbClr val="F7F7F2"/>
                 </a:solidFill>
@@ -5570,12 +5570,12 @@
             </a:lvl9pPr>
           </a:lstStyle>
           <a:p xmlns:a="http://schemas.openxmlformats.org/drawingml/2006/main">
-            <a:pPr>
+            <a:pPr algn="l">
               <a:lnSpc>
                 <a:spcPct val="116000"/>
               </a:lnSpc>
               <a:buNone/>
-              <a:defRPr>
+              <a:defRPr sz="1950">
                 <a:solidFill>
                   <a:srgbClr val="F7F7F2"/>
                 </a:solidFill>
@@ -5585,7 +5585,7 @@
               </a:defRPr>
             </a:pPr>
             <a:r>
-              <a:rPr sz="2020" b="0" u="none" strike="noStrike">
+              <a:rPr sz="1950" b="0" u="none" strike="noStrike">
                 <a:solidFill>
                   <a:srgbClr val="F7F7F2"/>
                 </a:solidFill>
@@ -5596,7 +5596,7 @@
               <a:t>官方 </a:t>
             </a:r>
             <a:r>
-              <a:rPr sz="2020" b="0" u="none" strike="noStrike">
+              <a:rPr sz="1950" b="0" u="none" strike="noStrike">
                 <a:solidFill>
                   <a:srgbClr val="F7F7F2"/>
                 </a:solidFill>
@@ -5607,7 +5607,7 @@
               <a:t>API </a:t>
             </a:r>
             <a:r>
-              <a:rPr sz="2020" b="0" u="none" strike="noStrike">
+              <a:rPr sz="1950" b="0" u="none" strike="noStrike">
                 <a:solidFill>
                   <a:srgbClr val="F7F7F2"/>
                 </a:solidFill>
@@ -5644,8 +5644,8 @@
         </p:nvSpPr>
         <p:spPr>
           <a:xfrm xmlns:a="http://schemas.openxmlformats.org/drawingml/2006/main">
-            <a:off x="6391440" y="3600360"/>
-            <a:ext cx="5190840" cy="475920"/>
+            <a:off x="6210300" y="4038600"/>
+            <a:ext cx="5372100" cy="609600"/>
           </a:xfrm>
           <a:prstGeom xmlns:a="http://schemas.openxmlformats.org/drawingml/2006/main" prst="rect">
             <a:avLst/>
@@ -5666,8 +5666,8 @@
             <a:noAutofit/>
           </a:bodyPr>
           <a:lstStyle xmlns:a="http://schemas.openxmlformats.org/drawingml/2006/main">
-            <a:defPPr>
-              <a:defRPr>
+            <a:defPPr algn="l">
+              <a:defRPr sz="1950">
                 <a:solidFill>
                   <a:srgbClr val="F7F7F2"/>
                 </a:solidFill>
@@ -5676,9 +5676,9 @@
                 <a:cs typeface="HarmonyOS Sans SC"/>
               </a:defRPr>
             </a:defPPr>
-            <a:lvl1pPr>
-              <a:buNone/>
-              <a:defRPr>
+            <a:lvl1pPr algn="l">
+              <a:buNone/>
+              <a:defRPr sz="1950">
                 <a:solidFill>
                   <a:srgbClr val="F7F7F2"/>
                 </a:solidFill>
@@ -5687,9 +5687,9 @@
                 <a:cs typeface="HarmonyOS Sans SC"/>
               </a:defRPr>
             </a:lvl1pPr>
-            <a:lvl2pPr>
-              <a:buNone/>
-              <a:defRPr>
+            <a:lvl2pPr algn="l">
+              <a:buNone/>
+              <a:defRPr sz="1950">
                 <a:solidFill>
                   <a:srgbClr val="F7F7F2"/>
                 </a:solidFill>
@@ -5698,9 +5698,9 @@
                 <a:cs typeface="HarmonyOS Sans SC"/>
               </a:defRPr>
             </a:lvl2pPr>
-            <a:lvl3pPr>
-              <a:buNone/>
-              <a:defRPr>
+            <a:lvl3pPr algn="l">
+              <a:buNone/>
+              <a:defRPr sz="1950">
                 <a:solidFill>
                   <a:srgbClr val="F7F7F2"/>
                 </a:solidFill>
@@ -5709,9 +5709,9 @@
                 <a:cs typeface="HarmonyOS Sans SC"/>
               </a:defRPr>
             </a:lvl3pPr>
-            <a:lvl4pPr>
-              <a:buNone/>
-              <a:defRPr>
+            <a:lvl4pPr algn="l">
+              <a:buNone/>
+              <a:defRPr sz="1950">
                 <a:solidFill>
                   <a:srgbClr val="F7F7F2"/>
                 </a:solidFill>
@@ -5720,9 +5720,9 @@
                 <a:cs typeface="HarmonyOS Sans SC"/>
               </a:defRPr>
             </a:lvl4pPr>
-            <a:lvl5pPr>
-              <a:buNone/>
-              <a:defRPr>
+            <a:lvl5pPr algn="l">
+              <a:buNone/>
+              <a:defRPr sz="1950">
                 <a:solidFill>
                   <a:srgbClr val="F7F7F2"/>
                 </a:solidFill>
@@ -5731,9 +5731,9 @@
                 <a:cs typeface="HarmonyOS Sans SC"/>
               </a:defRPr>
             </a:lvl5pPr>
-            <a:lvl6pPr>
-              <a:buNone/>
-              <a:defRPr>
+            <a:lvl6pPr algn="l">
+              <a:buNone/>
+              <a:defRPr sz="1950">
                 <a:solidFill>
                   <a:srgbClr val="F7F7F2"/>
                 </a:solidFill>
@@ -5742,9 +5742,9 @@
                 <a:cs typeface="HarmonyOS Sans SC"/>
               </a:defRPr>
             </a:lvl6pPr>
-            <a:lvl7pPr>
-              <a:buNone/>
-              <a:defRPr>
+            <a:lvl7pPr algn="l">
+              <a:buNone/>
+              <a:defRPr sz="1950">
                 <a:solidFill>
                   <a:srgbClr val="F7F7F2"/>
                 </a:solidFill>
@@ -5753,9 +5753,9 @@
                 <a:cs typeface="HarmonyOS Sans SC"/>
               </a:defRPr>
             </a:lvl7pPr>
-            <a:lvl8pPr>
-              <a:buNone/>
-              <a:defRPr>
+            <a:lvl8pPr algn="l">
+              <a:buNone/>
+              <a:defRPr sz="1950">
                 <a:solidFill>
                   <a:srgbClr val="F7F7F2"/>
                 </a:solidFill>
@@ -5764,9 +5764,9 @@
                 <a:cs typeface="HarmonyOS Sans SC"/>
               </a:defRPr>
             </a:lvl8pPr>
-            <a:lvl9pPr>
-              <a:buNone/>
-              <a:defRPr>
+            <a:lvl9pPr algn="l">
+              <a:buNone/>
+              <a:defRPr sz="1950">
                 <a:solidFill>
                   <a:srgbClr val="F7F7F2"/>
                 </a:solidFill>
@@ -5777,12 +5777,12 @@
             </a:lvl9pPr>
           </a:lstStyle>
           <a:p xmlns:a="http://schemas.openxmlformats.org/drawingml/2006/main">
-            <a:pPr>
+            <a:pPr algn="l">
               <a:lnSpc>
                 <a:spcPct val="116000"/>
               </a:lnSpc>
               <a:buNone/>
-              <a:defRPr>
+              <a:defRPr sz="1950">
                 <a:solidFill>
                   <a:srgbClr val="F7F7F2"/>
                 </a:solidFill>
@@ -5792,7 +5792,7 @@
               </a:defRPr>
             </a:pPr>
             <a:r>
-              <a:rPr sz="2020" b="0" u="none" strike="noStrike">
+              <a:rPr sz="1950" b="0" u="none" strike="noStrike">
                 <a:solidFill>
                   <a:srgbClr val="F7F7F2"/>
                 </a:solidFill>
@@ -5829,8 +5829,8 @@
         </p:nvSpPr>
         <p:spPr>
           <a:xfrm xmlns:a="http://schemas.openxmlformats.org/drawingml/2006/main">
-            <a:off x="6391440" y="4505400"/>
-            <a:ext cx="5190840" cy="475920"/>
+            <a:off x="6210300" y="4953000"/>
+            <a:ext cx="5372100" cy="609600"/>
           </a:xfrm>
           <a:prstGeom xmlns:a="http://schemas.openxmlformats.org/drawingml/2006/main" prst="rect">
             <a:avLst/>
@@ -5851,8 +5851,8 @@
             <a:noAutofit/>
           </a:bodyPr>
           <a:lstStyle xmlns:a="http://schemas.openxmlformats.org/drawingml/2006/main">
-            <a:defPPr>
-              <a:defRPr>
+            <a:defPPr algn="l">
+              <a:defRPr sz="1950">
                 <a:solidFill>
                   <a:srgbClr val="F7F7F2"/>
                 </a:solidFill>
@@ -5861,9 +5861,9 @@
                 <a:cs typeface="HarmonyOS Sans SC"/>
               </a:defRPr>
             </a:defPPr>
-            <a:lvl1pPr>
-              <a:buNone/>
-              <a:defRPr>
+            <a:lvl1pPr algn="l">
+              <a:buNone/>
+              <a:defRPr sz="1950">
                 <a:solidFill>
                   <a:srgbClr val="F7F7F2"/>
                 </a:solidFill>
@@ -5872,9 +5872,9 @@
                 <a:cs typeface="HarmonyOS Sans SC"/>
               </a:defRPr>
             </a:lvl1pPr>
-            <a:lvl2pPr>
-              <a:buNone/>
-              <a:defRPr>
+            <a:lvl2pPr algn="l">
+              <a:buNone/>
+              <a:defRPr sz="1950">
                 <a:solidFill>
                   <a:srgbClr val="F7F7F2"/>
                 </a:solidFill>
@@ -5883,9 +5883,9 @@
                 <a:cs typeface="HarmonyOS Sans SC"/>
               </a:defRPr>
             </a:lvl2pPr>
-            <a:lvl3pPr>
-              <a:buNone/>
-              <a:defRPr>
+            <a:lvl3pPr algn="l">
+              <a:buNone/>
+              <a:defRPr sz="1950">
                 <a:solidFill>
                   <a:srgbClr val="F7F7F2"/>
                 </a:solidFill>
@@ -5894,9 +5894,9 @@
                 <a:cs typeface="HarmonyOS Sans SC"/>
               </a:defRPr>
             </a:lvl3pPr>
-            <a:lvl4pPr>
-              <a:buNone/>
-              <a:defRPr>
+            <a:lvl4pPr algn="l">
+              <a:buNone/>
+              <a:defRPr sz="1950">
                 <a:solidFill>
                   <a:srgbClr val="F7F7F2"/>
                 </a:solidFill>
@@ -5905,9 +5905,9 @@
                 <a:cs typeface="HarmonyOS Sans SC"/>
               </a:defRPr>
             </a:lvl4pPr>
-            <a:lvl5pPr>
-              <a:buNone/>
-              <a:defRPr>
+            <a:lvl5pPr algn="l">
+              <a:buNone/>
+              <a:defRPr sz="1950">
                 <a:solidFill>
                   <a:srgbClr val="F7F7F2"/>
                 </a:solidFill>
@@ -5916,9 +5916,9 @@
                 <a:cs typeface="HarmonyOS Sans SC"/>
               </a:defRPr>
             </a:lvl5pPr>
-            <a:lvl6pPr>
-              <a:buNone/>
-              <a:defRPr>
+            <a:lvl6pPr algn="l">
+              <a:buNone/>
+              <a:defRPr sz="1950">
                 <a:solidFill>
                   <a:srgbClr val="F7F7F2"/>
                 </a:solidFill>
@@ -5927,9 +5927,9 @@
                 <a:cs typeface="HarmonyOS Sans SC"/>
               </a:defRPr>
             </a:lvl6pPr>
-            <a:lvl7pPr>
-              <a:buNone/>
-              <a:defRPr>
+            <a:lvl7pPr algn="l">
+              <a:buNone/>
+              <a:defRPr sz="1950">
                 <a:solidFill>
                   <a:srgbClr val="F7F7F2"/>
                 </a:solidFill>
@@ -5938,9 +5938,9 @@
                 <a:cs typeface="HarmonyOS Sans SC"/>
               </a:defRPr>
             </a:lvl7pPr>
-            <a:lvl8pPr>
-              <a:buNone/>
-              <a:defRPr>
+            <a:lvl8pPr algn="l">
+              <a:buNone/>
+              <a:defRPr sz="1950">
                 <a:solidFill>
                   <a:srgbClr val="F7F7F2"/>
                 </a:solidFill>
@@ -5949,9 +5949,9 @@
                 <a:cs typeface="HarmonyOS Sans SC"/>
               </a:defRPr>
             </a:lvl8pPr>
-            <a:lvl9pPr>
-              <a:buNone/>
-              <a:defRPr>
+            <a:lvl9pPr algn="l">
+              <a:buNone/>
+              <a:defRPr sz="1950">
                 <a:solidFill>
                   <a:srgbClr val="F7F7F2"/>
                 </a:solidFill>
@@ -5962,12 +5962,12 @@
             </a:lvl9pPr>
           </a:lstStyle>
           <a:p xmlns:a="http://schemas.openxmlformats.org/drawingml/2006/main">
-            <a:pPr>
+            <a:pPr algn="l">
               <a:lnSpc>
                 <a:spcPct val="116000"/>
               </a:lnSpc>
               <a:buNone/>
-              <a:defRPr>
+              <a:defRPr sz="1950">
                 <a:solidFill>
                   <a:srgbClr val="F7F7F2"/>
                 </a:solidFill>
@@ -5977,7 +5977,7 @@
               </a:defRPr>
             </a:pPr>
             <a:r>
-              <a:rPr sz="2020" b="0" u="none" strike="noStrike">
+              <a:rPr sz="1950" b="0" u="none" strike="noStrike">
                 <a:solidFill>
                   <a:srgbClr val="F7F7F2"/>
                 </a:solidFill>
@@ -6014,8 +6014,8 @@
         </p:nvSpPr>
         <p:spPr>
           <a:xfrm xmlns:a="http://schemas.openxmlformats.org/drawingml/2006/main">
-            <a:off x="628560" y="5800680"/>
-            <a:ext cx="10667520" cy="447480"/>
+            <a:off x="609600" y="5791200"/>
+            <a:ext cx="10972800" cy="457200"/>
           </a:xfrm>
           <a:prstGeom xmlns:a="http://schemas.openxmlformats.org/drawingml/2006/main" prst="rect">
             <a:avLst/>
@@ -6036,8 +6036,8 @@
             <a:noAutofit/>
           </a:bodyPr>
           <a:lstStyle xmlns:a="http://schemas.openxmlformats.org/drawingml/2006/main">
-            <a:defPPr>
-              <a:defRPr>
+            <a:defPPr algn="l">
+              <a:defRPr sz="2100">
                 <a:solidFill>
                   <a:srgbClr val="F7F7F2"/>
                 </a:solidFill>
@@ -6046,9 +6046,9 @@
                 <a:cs typeface="HarmonyOS Sans SC"/>
               </a:defRPr>
             </a:defPPr>
-            <a:lvl1pPr>
-              <a:buNone/>
-              <a:defRPr>
+            <a:lvl1pPr algn="l">
+              <a:buNone/>
+              <a:defRPr sz="2100">
                 <a:solidFill>
                   <a:srgbClr val="F7F7F2"/>
                 </a:solidFill>
@@ -6057,9 +6057,9 @@
                 <a:cs typeface="HarmonyOS Sans SC"/>
               </a:defRPr>
             </a:lvl1pPr>
-            <a:lvl2pPr>
-              <a:buNone/>
-              <a:defRPr>
+            <a:lvl2pPr algn="l">
+              <a:buNone/>
+              <a:defRPr sz="2100">
                 <a:solidFill>
                   <a:srgbClr val="F7F7F2"/>
                 </a:solidFill>
@@ -6068,9 +6068,9 @@
                 <a:cs typeface="HarmonyOS Sans SC"/>
               </a:defRPr>
             </a:lvl2pPr>
-            <a:lvl3pPr>
-              <a:buNone/>
-              <a:defRPr>
+            <a:lvl3pPr algn="l">
+              <a:buNone/>
+              <a:defRPr sz="2100">
                 <a:solidFill>
                   <a:srgbClr val="F7F7F2"/>
                 </a:solidFill>
@@ -6079,9 +6079,9 @@
                 <a:cs typeface="HarmonyOS Sans SC"/>
               </a:defRPr>
             </a:lvl3pPr>
-            <a:lvl4pPr>
-              <a:buNone/>
-              <a:defRPr>
+            <a:lvl4pPr algn="l">
+              <a:buNone/>
+              <a:defRPr sz="2100">
                 <a:solidFill>
                   <a:srgbClr val="F7F7F2"/>
                 </a:solidFill>
@@ -6090,9 +6090,9 @@
                 <a:cs typeface="HarmonyOS Sans SC"/>
               </a:defRPr>
             </a:lvl4pPr>
-            <a:lvl5pPr>
-              <a:buNone/>
-              <a:defRPr>
+            <a:lvl5pPr algn="l">
+              <a:buNone/>
+              <a:defRPr sz="2100">
                 <a:solidFill>
                   <a:srgbClr val="F7F7F2"/>
                 </a:solidFill>
@@ -6101,9 +6101,9 @@
                 <a:cs typeface="HarmonyOS Sans SC"/>
               </a:defRPr>
             </a:lvl5pPr>
-            <a:lvl6pPr>
-              <a:buNone/>
-              <a:defRPr>
+            <a:lvl6pPr algn="l">
+              <a:buNone/>
+              <a:defRPr sz="2100">
                 <a:solidFill>
                   <a:srgbClr val="F7F7F2"/>
                 </a:solidFill>
@@ -6112,9 +6112,9 @@
                 <a:cs typeface="HarmonyOS Sans SC"/>
               </a:defRPr>
             </a:lvl6pPr>
-            <a:lvl7pPr>
-              <a:buNone/>
-              <a:defRPr>
+            <a:lvl7pPr algn="l">
+              <a:buNone/>
+              <a:defRPr sz="2100">
                 <a:solidFill>
                   <a:srgbClr val="F7F7F2"/>
                 </a:solidFill>
@@ -6123,9 +6123,9 @@
                 <a:cs typeface="HarmonyOS Sans SC"/>
               </a:defRPr>
             </a:lvl7pPr>
-            <a:lvl8pPr>
-              <a:buNone/>
-              <a:defRPr>
+            <a:lvl8pPr algn="l">
+              <a:buNone/>
+              <a:defRPr sz="2100">
                 <a:solidFill>
                   <a:srgbClr val="F7F7F2"/>
                 </a:solidFill>
@@ -6134,9 +6134,9 @@
                 <a:cs typeface="HarmonyOS Sans SC"/>
               </a:defRPr>
             </a:lvl8pPr>
-            <a:lvl9pPr>
-              <a:buNone/>
-              <a:defRPr>
+            <a:lvl9pPr algn="l">
+              <a:buNone/>
+              <a:defRPr sz="2100">
                 <a:solidFill>
                   <a:srgbClr val="F7F7F2"/>
                 </a:solidFill>
@@ -6147,12 +6147,12 @@
             </a:lvl9pPr>
           </a:lstStyle>
           <a:p xmlns:a="http://schemas.openxmlformats.org/drawingml/2006/main">
-            <a:pPr>
+            <a:pPr algn="l">
               <a:lnSpc>
                 <a:spcPct val="116000"/>
               </a:lnSpc>
               <a:buNone/>
-              <a:defRPr>
+              <a:defRPr sz="2100">
                 <a:solidFill>
                   <a:srgbClr val="F7F7F2"/>
                 </a:solidFill>
@@ -6162,7 +6162,7 @@
               </a:defRPr>
             </a:pPr>
             <a:r>
-              <a:rPr sz="2400" b="1" u="none" strike="noStrike">
+              <a:rPr sz="2100" b="1" u="none" strike="noStrike">
                 <a:solidFill>
                   <a:srgbClr val="F7F7F2"/>
                 </a:solidFill>
@@ -6209,7 +6209,7 @@
         </p:blipFill>
         <p:spPr>
           <a:xfrm xmlns:a="http://schemas.openxmlformats.org/drawingml/2006/main">
-            <a:off x="609600" y="6524625"/>
+            <a:off x="609600" y="6400800"/>
             <a:ext cx="1952625" cy="228220"/>
           </a:xfrm>
           <a:prstGeom xmlns:a="http://schemas.openxmlformats.org/drawingml/2006/main" prst="rect">
@@ -6233,8 +6233,8 @@
         </p:nvSpPr>
         <p:spPr>
           <a:xfrm xmlns:a="http://schemas.openxmlformats.org/drawingml/2006/main">
-            <a:off x="11191875" y="6505575"/>
-            <a:ext cx="419100" cy="247650"/>
+            <a:off x="11163300" y="6400800"/>
+            <a:ext cx="419100" cy="228600"/>
           </a:xfrm>
           <a:prstGeom xmlns:a="http://schemas.openxmlformats.org/drawingml/2006/main" prst="rect">
             <a:avLst/>
@@ -6245,7 +6245,7 @@
           </a:ln>
         </p:spPr>
         <p:txBody>
-          <a:bodyPr xmlns:a="http://schemas.openxmlformats.org/drawingml/2006/main" wrap="none" lIns="0" tIns="0" rIns="0" bIns="0" anchor="ctr">
+          <a:bodyPr xmlns:a="http://schemas.openxmlformats.org/drawingml/2006/main" wrap="none" lIns="0" tIns="0" rIns="0" bIns="0" anchor="t">
             <a:noAutofit/>
           </a:bodyPr>
           <a:lstStyle xmlns:a="http://schemas.openxmlformats.org/drawingml/2006/main">
